--- a/3-Master_Plan/re_entry/HEROs_and_PASSes/slides/auto/CHAR_lambda_characterization_AUTO.pptx
+++ b/3-Master_Plan/re_entry/HEROs_and_PASSes/slides/auto/CHAR_lambda_characterization_AUTO.pptx
@@ -3125,7 +3125,23 @@
             </a:r>
             <a:r>
               <a:rPr sz="2000"/>
-              <a:t> (congestion in score)</a:t>
+              <a:t> (weight on </a:t>
+            </a:r>
+            <a:r>
+              <a:rPr sz="2000" i="1">
+                <a:latin typeface="Cambria Math"/>
+              </a:rPr>
+              <a:t>L</a:t>
+            </a:r>
+            <a:r>
+              <a:rPr sz="1800" i="1" baseline="-25000">
+                <a:latin typeface="Cambria Math"/>
+              </a:rPr>
+              <a:t>C</a:t>
+            </a:r>
+            <a:r>
+              <a:rPr sz="2000"/>
+              <a:t> in score)</a:t>
             </a:r>
           </a:p>
         </p:txBody>
@@ -3433,7 +3449,7 @@
               <a:rPr sz="800" i="1" baseline="-25000">
                 <a:latin typeface="Cambria Math"/>
               </a:rPr>
-              <a:t>j</a:t>
+              <a:t>j^*</a:t>
             </a:r>
             <a:r>
               <a:rPr sz="900"/>

--- a/3-Master_Plan/re_entry/HEROs_and_PASSes/slides/auto/CHAR_lambda_characterization_AUTO.pptx
+++ b/3-Master_Plan/re_entry/HEROs_and_PASSes/slides/auto/CHAR_lambda_characterization_AUTO.pptx
@@ -3381,8 +3381,8 @@
         </p:blipFill>
         <p:spPr>
           <a:xfrm>
-            <a:off x="5113759" y="768096"/>
-            <a:ext cx="6325864" cy="3895344"/>
+            <a:off x="5244668" y="768096"/>
+            <a:ext cx="6064047" cy="3895344"/>
           </a:xfrm>
           <a:prstGeom prst="rect">
             <a:avLst/>
